--- a/Presentation.pptx
+++ b/Presentation.pptx
@@ -283,7 +283,7 @@
           <a:p>
             <a:fld id="{C4270120-CDFC-48DE-A6EA-6DEEDD0E436A}" type="datetimeFigureOut">
               <a:rPr lang="en-US" dirty="0"/>
-              <a:t>12/1/2025</a:t>
+              <a:t>12/2/2025</a:t>
             </a:fld>
             <a:endParaRPr lang="en-US" dirty="0"/>
           </a:p>
@@ -577,7 +577,7 @@
           <a:p>
             <a:fld id="{2A1F5BA7-0A17-4D30-9B66-E29324151C73}" type="datetimeFigureOut">
               <a:rPr lang="en-US" dirty="0"/>
-              <a:t>12/1/2025</a:t>
+              <a:t>12/2/2025</a:t>
             </a:fld>
             <a:endParaRPr lang="en-US" dirty="0"/>
           </a:p>
@@ -833,7 +833,7 @@
           <a:p>
             <a:fld id="{76BEBB1B-D40A-4DB9-B3DE-BAAE675B83CD}" type="datetimeFigureOut">
               <a:rPr lang="en-US" dirty="0"/>
-              <a:t>12/1/2025</a:t>
+              <a:t>12/2/2025</a:t>
             </a:fld>
             <a:endParaRPr lang="en-US" dirty="0"/>
           </a:p>
@@ -1089,7 +1089,7 @@
           <a:p>
             <a:fld id="{A3C9FAAF-C467-4C93-8ECD-39AF5A14D498}" type="datetimeFigureOut">
               <a:rPr lang="en-US" dirty="0"/>
-              <a:t>12/1/2025</a:t>
+              <a:t>12/2/2025</a:t>
             </a:fld>
             <a:endParaRPr lang="en-US" dirty="0"/>
           </a:p>
@@ -1414,7 +1414,7 @@
           <a:p>
             <a:fld id="{3E37E480-B2BA-4553-A144-61E7F75833ED}" type="datetimeFigureOut">
               <a:rPr lang="en-US" dirty="0"/>
-              <a:t>12/1/2025</a:t>
+              <a:t>12/2/2025</a:t>
             </a:fld>
             <a:endParaRPr lang="en-US" dirty="0"/>
           </a:p>
@@ -1768,7 +1768,7 @@
           <a:p>
             <a:fld id="{390E682A-6B53-4B08-AE4D-4C5E659103CC}" type="datetimeFigureOut">
               <a:rPr lang="en-US" dirty="0"/>
-              <a:t>12/1/2025</a:t>
+              <a:t>12/2/2025</a:t>
             </a:fld>
             <a:endParaRPr lang="en-US" dirty="0"/>
           </a:p>
@@ -2284,7 +2284,7 @@
           <a:p>
             <a:fld id="{7C69F0F6-BEBB-4894-ABB2-75C5CBE0DDB9}" type="datetimeFigureOut">
               <a:rPr lang="en-US" dirty="0"/>
-              <a:t>12/1/2025</a:t>
+              <a:t>12/2/2025</a:t>
             </a:fld>
             <a:endParaRPr lang="en-US" dirty="0"/>
           </a:p>
@@ -2600,7 +2600,7 @@
           <a:p>
             <a:fld id="{8B3E9E5F-17D9-4A30-9DA3-64E46A6DF111}" type="datetimeFigureOut">
               <a:rPr lang="en-US" dirty="0"/>
-              <a:t>12/1/2025</a:t>
+              <a:t>12/2/2025</a:t>
             </a:fld>
             <a:endParaRPr lang="en-US" dirty="0"/>
           </a:p>
@@ -2717,7 +2717,7 @@
           <a:p>
             <a:fld id="{033AC5F0-3BC3-4718-BCCA-24B5655EC864}" type="datetimeFigureOut">
               <a:rPr lang="en-US" dirty="0"/>
-              <a:t>12/1/2025</a:t>
+              <a:t>12/2/2025</a:t>
             </a:fld>
             <a:endParaRPr lang="en-US" dirty="0"/>
           </a:p>
@@ -3062,7 +3062,7 @@
           <a:p>
             <a:fld id="{9EB8BD81-465B-40F2-9A54-9DF3B12AF598}" type="datetimeFigureOut">
               <a:rPr lang="en-US" dirty="0"/>
-              <a:t>12/1/2025</a:t>
+              <a:t>12/2/2025</a:t>
             </a:fld>
             <a:endParaRPr lang="en-US" dirty="0"/>
           </a:p>
@@ -3366,7 +3366,7 @@
           <a:p>
             <a:fld id="{F04B3CEF-64EF-4C43-9530-8E9CBFD2CAD1}" type="datetimeFigureOut">
               <a:rPr lang="en-US" dirty="0"/>
-              <a:t>12/1/2025</a:t>
+              <a:t>12/2/2025</a:t>
             </a:fld>
             <a:endParaRPr lang="en-US" dirty="0"/>
           </a:p>
@@ -3609,7 +3609,7 @@
           <a:p>
             <a:fld id="{B70A3DFD-A535-46B2-84C1-61DC8B16A904}" type="datetimeFigureOut">
               <a:rPr lang="en-US" dirty="0"/>
-              <a:t>12/1/2025</a:t>
+              <a:t>12/2/2025</a:t>
             </a:fld>
             <a:endParaRPr lang="en-US" dirty="0"/>
           </a:p>
@@ -4519,7 +4519,7 @@
           <a:lstStyle/>
           <a:p>
             <a:fld id="{AD6E1EBF-D5B7-43F2-A5E2-415383AEF6CD}" type="datetime1">
-              <a:t>12/1/2025</a:t>
+              <a:t>02.12.2025</a:t>
             </a:fld>
             <a:endParaRPr lang="en-US" dirty="0"/>
           </a:p>
@@ -4688,7 +4688,7 @@
           <a:lstStyle/>
           <a:p>
             <a:fld id="{F0A60714-C537-4438-9452-296D528D6BEB}" type="datetime1">
-              <a:t>12/1/2025</a:t>
+              <a:t>02.12.2025</a:t>
             </a:fld>
             <a:endParaRPr lang="en-US"/>
           </a:p>
@@ -5390,7 +5390,8 @@
           <a:lstStyle/>
           <a:p>
             <a:fld id="{7EE0C613-8EA2-49AF-AAE4-34430B334CE9}" type="datetime1">
-              <a:t>12/1/2025</a:t>
+              <a:rPr lang="pl-PL"/>
+              <a:t>02.12.2025</a:t>
             </a:fld>
             <a:endParaRPr lang="en-US"/>
           </a:p>
@@ -5900,7 +5901,7 @@
           <a:lstStyle/>
           <a:p>
             <a:fld id="{7EE0C613-8EA2-49AF-AAE4-34430B334CE9}" type="datetime1">
-              <a:t>12/1/2025</a:t>
+              <a:t>02.12.2025</a:t>
             </a:fld>
             <a:endParaRPr lang="en-US" dirty="0"/>
           </a:p>
@@ -6685,6 +6686,69 @@
           </a:graphicData>
         </a:graphic>
       </p:graphicFrame>
+      <p:sp>
+        <p:nvSpPr>
+          <p:cNvPr id="3" name="pole tekstowe 2">
+            <a:extLst>
+              <a:ext uri="{FF2B5EF4-FFF2-40B4-BE49-F238E27FC236}">
+                <a16:creationId xmlns:a16="http://schemas.microsoft.com/office/drawing/2014/main" id="{0A324B48-A114-F0B2-AE38-4231E87EFDA6}"/>
+              </a:ext>
+            </a:extLst>
+          </p:cNvPr>
+          <p:cNvSpPr txBox="1"/>
+          <p:nvPr/>
+        </p:nvSpPr>
+        <p:spPr>
+          <a:xfrm>
+            <a:off x="7519147" y="2173941"/>
+            <a:ext cx="3866029" cy="646331"/>
+          </a:xfrm>
+          <a:prstGeom prst="rect">
+            <a:avLst/>
+          </a:prstGeom>
+          <a:noFill/>
+        </p:spPr>
+        <p:txBody>
+          <a:bodyPr wrap="square" rtlCol="0">
+            <a:spAutoFit/>
+          </a:bodyPr>
+          <a:lstStyle/>
+          <a:p>
+            <a:r>
+              <a:rPr lang="pl-PL" dirty="0" err="1">
+                <a:latin typeface="Calibri" panose="020F0502020204030204" pitchFamily="34" charset="0"/>
+                <a:ea typeface="Calibri" panose="020F0502020204030204" pitchFamily="34" charset="0"/>
+                <a:cs typeface="Calibri" panose="020F0502020204030204" pitchFamily="34" charset="0"/>
+              </a:rPr>
+              <a:t>Profilo</a:t>
+            </a:r>
+            <a:r>
+              <a:rPr lang="pl-PL" dirty="0">
+                <a:latin typeface="Calibri" panose="020F0502020204030204" pitchFamily="34" charset="0"/>
+                <a:ea typeface="Calibri" panose="020F0502020204030204" pitchFamily="34" charset="0"/>
+                <a:cs typeface="Calibri" panose="020F0502020204030204" pitchFamily="34" charset="0"/>
+              </a:rPr>
+              <a:t> </a:t>
+            </a:r>
+            <a:r>
+              <a:rPr lang="pl-PL" dirty="0" err="1">
+                <a:latin typeface="Calibri" panose="020F0502020204030204" pitchFamily="34" charset="0"/>
+                <a:ea typeface="Calibri" panose="020F0502020204030204" pitchFamily="34" charset="0"/>
+                <a:cs typeface="Calibri" panose="020F0502020204030204" pitchFamily="34" charset="0"/>
+              </a:rPr>
+              <a:t>WoE</a:t>
+            </a:r>
+            <a:r>
+              <a:rPr lang="pl-PL" dirty="0">
+                <a:latin typeface="Calibri" panose="020F0502020204030204" pitchFamily="34" charset="0"/>
+                <a:ea typeface="Calibri" panose="020F0502020204030204" pitchFamily="34" charset="0"/>
+                <a:cs typeface="Calibri" panose="020F0502020204030204" pitchFamily="34" charset="0"/>
+              </a:rPr>
+              <a:t> dla wskaźnika mnożnika kapitału własnego:</a:t>
+            </a:r>
+          </a:p>
+        </p:txBody>
+      </p:sp>
     </p:spTree>
     <p:extLst>
       <p:ext uri="{BB962C8B-B14F-4D97-AF65-F5344CB8AC3E}">
@@ -6910,7 +6974,8 @@
           <a:lstStyle/>
           <a:p>
             <a:fld id="{3520EEF0-31D2-4846-A48F-4F898E20454F}" type="datetime1">
-              <a:t>12/1/2025</a:t>
+              <a:rPr lang="pl-PL"/>
+              <a:t>02.12.2025</a:t>
             </a:fld>
             <a:endParaRPr lang="en-US" dirty="0"/>
           </a:p>
@@ -7976,7 +8041,8 @@
           <a:lstStyle/>
           <a:p>
             <a:fld id="{5FCAC423-9313-454E-A098-8D3021A3AC0B}" type="datetime1">
-              <a:t>12/1/2025</a:t>
+              <a:rPr lang="pl-PL"/>
+              <a:t>02.12.2025</a:t>
             </a:fld>
             <a:endParaRPr lang="en-US"/>
           </a:p>

--- a/Presentation.pptx
+++ b/Presentation.pptx
@@ -4229,10 +4229,10 @@
       </p:sp>
       <p:pic>
         <p:nvPicPr>
-          <p:cNvPr id="4" name="Symbol zastępczy zawartości 3" descr="Obraz zawierający tekst, numer, diagram, Czcionka&#10;&#10;Zawartość wygenerowana przez AI może być niepoprawna.">
-            <a:extLst>
-              <a:ext uri="{FF2B5EF4-FFF2-40B4-BE49-F238E27FC236}">
-                <a16:creationId xmlns:a16="http://schemas.microsoft.com/office/drawing/2014/main" id="{9B7F568D-0C3B-D4BA-E1CF-20BD94E1FD50}"/>
+          <p:cNvPr id="7" name="Symbol zastępczy zawartości 6" descr="Obraz zawierający tekst, diagram, linia, numer&#10;&#10;Zawartość wygenerowana przez AI może być niepoprawna.">
+            <a:extLst>
+              <a:ext uri="{FF2B5EF4-FFF2-40B4-BE49-F238E27FC236}">
+                <a16:creationId xmlns:a16="http://schemas.microsoft.com/office/drawing/2014/main" id="{9DC5D63E-DF73-FB64-8B00-76B786E2C28C}"/>
               </a:ext>
             </a:extLst>
           </p:cNvPr>
@@ -4244,19 +4244,22 @@
           </p:nvPr>
         </p:nvPicPr>
         <p:blipFill>
-          <a:blip r:embed="rId2"/>
+          <a:blip r:embed="rId2">
+            <a:extLst>
+              <a:ext uri="{28A0092B-C50C-407E-A947-70E740481C1C}">
+                <a14:useLocalDpi xmlns:a14="http://schemas.microsoft.com/office/drawing/2010/main" val="0"/>
+              </a:ext>
+            </a:extLst>
+          </a:blip>
           <a:stretch>
             <a:fillRect/>
           </a:stretch>
         </p:blipFill>
         <p:spPr>
           <a:xfrm>
-            <a:off x="-488" y="2467267"/>
-            <a:ext cx="12192488" cy="3332643"/>
+            <a:off x="12893" y="2892922"/>
+            <a:ext cx="12179107" cy="3422818"/>
           </a:xfrm>
-          <a:prstGeom prst="rect">
-            <a:avLst/>
-          </a:prstGeom>
         </p:spPr>
       </p:pic>
     </p:spTree>
@@ -4333,10 +4336,10 @@
       </p:sp>
       <p:pic>
         <p:nvPicPr>
-          <p:cNvPr id="6" name="Symbol zastępczy zawartości 5" descr="Obraz zawierający tekst, zrzut ekranu, diagram, numer&#10;&#10;Zawartość wygenerowana przez AI może być niepoprawna.">
-            <a:extLst>
-              <a:ext uri="{FF2B5EF4-FFF2-40B4-BE49-F238E27FC236}">
-                <a16:creationId xmlns:a16="http://schemas.microsoft.com/office/drawing/2014/main" id="{46A2B1A2-A9CC-0A9C-A40D-B539AFFCAAC9}"/>
+          <p:cNvPr id="7" name="Symbol zastępczy zawartości 6" descr="Obraz zawierający tekst, diagram, Czcionka, linia&#10;&#10;Zawartość wygenerowana przez AI może być niepoprawna.">
+            <a:extLst>
+              <a:ext uri="{FF2B5EF4-FFF2-40B4-BE49-F238E27FC236}">
+                <a16:creationId xmlns:a16="http://schemas.microsoft.com/office/drawing/2014/main" id="{89C4D14E-6FD1-0E43-1740-3DAC8568970A}"/>
               </a:ext>
             </a:extLst>
           </p:cNvPr>
@@ -4348,19 +4351,22 @@
           </p:nvPr>
         </p:nvPicPr>
         <p:blipFill>
-          <a:blip r:embed="rId2"/>
+          <a:blip r:embed="rId2">
+            <a:extLst>
+              <a:ext uri="{28A0092B-C50C-407E-A947-70E740481C1C}">
+                <a14:useLocalDpi xmlns:a14="http://schemas.microsoft.com/office/drawing/2010/main" val="0"/>
+              </a:ext>
+            </a:extLst>
+          </a:blip>
           <a:stretch>
             <a:fillRect/>
           </a:stretch>
         </p:blipFill>
         <p:spPr>
           <a:xfrm>
-            <a:off x="92640" y="2515755"/>
-            <a:ext cx="12011011" cy="3109528"/>
+            <a:off x="146853" y="2985919"/>
+            <a:ext cx="11988235" cy="3127802"/>
           </a:xfrm>
-          <a:prstGeom prst="rect">
-            <a:avLst/>
-          </a:prstGeom>
         </p:spPr>
       </p:pic>
     </p:spTree>
@@ -4461,36 +4467,603 @@
           <a:lstStyle/>
           <a:p>
             <a:r>
-              <a:rPr lang="en-US">
-                <a:ea typeface="+mn-lt"/>
-                <a:cs typeface="+mn-lt"/>
-              </a:rPr>
-              <a:t>Reprezentatywność próby: Model bazuje na danych historycznych. Nagła zmiana koniunktury gospodarczej może wymagać rekalibracji (ryzyko niestabilności makroekonomicznej). Należy śledzić PSI/CSI.</a:t>
-            </a:r>
-          </a:p>
-          <a:p>
-            <a:r>
-              <a:rPr lang="en-US">
-                <a:ea typeface="+mn-lt"/>
-                <a:cs typeface="+mn-lt"/>
-              </a:rPr>
-              <a:t>Black-box: Model Black-Box wydaje się nieco przeuczony, może mieć momentami problemy dla nowych danych.</a:t>
-            </a:r>
-          </a:p>
-          <a:p>
-            <a:r>
-              <a:rPr lang="en-US">
-                <a:ea typeface="+mn-lt"/>
-                <a:cs typeface="+mn-lt"/>
-              </a:rPr>
-              <a:t>Złożone zależności Na regresji logistycznej ryzyko, że koszyki WoE nie odzwierciedlą prawdziwych danych.</a:t>
+              <a:rPr lang="en-US" dirty="0" err="1">
+                <a:ea typeface="+mn-lt"/>
+                <a:cs typeface="+mn-lt"/>
+              </a:rPr>
+              <a:t>Reprezentatywność</a:t>
+            </a:r>
+            <a:r>
+              <a:rPr lang="en-US" dirty="0">
+                <a:ea typeface="+mn-lt"/>
+                <a:cs typeface="+mn-lt"/>
+              </a:rPr>
+              <a:t> </a:t>
+            </a:r>
+            <a:r>
+              <a:rPr lang="en-US" dirty="0" err="1">
+                <a:ea typeface="+mn-lt"/>
+                <a:cs typeface="+mn-lt"/>
+              </a:rPr>
+              <a:t>próby</a:t>
+            </a:r>
+            <a:r>
+              <a:rPr lang="en-US" dirty="0">
+                <a:ea typeface="+mn-lt"/>
+                <a:cs typeface="+mn-lt"/>
+              </a:rPr>
+              <a:t>: Model </a:t>
+            </a:r>
+            <a:r>
+              <a:rPr lang="en-US" dirty="0" err="1">
+                <a:ea typeface="+mn-lt"/>
+                <a:cs typeface="+mn-lt"/>
+              </a:rPr>
+              <a:t>bazuje</a:t>
+            </a:r>
+            <a:r>
+              <a:rPr lang="en-US" dirty="0">
+                <a:ea typeface="+mn-lt"/>
+                <a:cs typeface="+mn-lt"/>
+              </a:rPr>
+              <a:t> </a:t>
+            </a:r>
+            <a:r>
+              <a:rPr lang="en-US" dirty="0" err="1">
+                <a:ea typeface="+mn-lt"/>
+                <a:cs typeface="+mn-lt"/>
+              </a:rPr>
+              <a:t>na</a:t>
+            </a:r>
+            <a:r>
+              <a:rPr lang="en-US" dirty="0">
+                <a:ea typeface="+mn-lt"/>
+                <a:cs typeface="+mn-lt"/>
+              </a:rPr>
+              <a:t> </a:t>
+            </a:r>
+            <a:r>
+              <a:rPr lang="en-US" dirty="0" err="1">
+                <a:ea typeface="+mn-lt"/>
+                <a:cs typeface="+mn-lt"/>
+              </a:rPr>
+              <a:t>danych</a:t>
+            </a:r>
+            <a:r>
+              <a:rPr lang="en-US" dirty="0">
+                <a:ea typeface="+mn-lt"/>
+                <a:cs typeface="+mn-lt"/>
+              </a:rPr>
+              <a:t> </a:t>
+            </a:r>
+            <a:r>
+              <a:rPr lang="en-US" dirty="0" err="1">
+                <a:ea typeface="+mn-lt"/>
+                <a:cs typeface="+mn-lt"/>
+              </a:rPr>
+              <a:t>historycznych</a:t>
+            </a:r>
+            <a:r>
+              <a:rPr lang="en-US" dirty="0">
+                <a:ea typeface="+mn-lt"/>
+                <a:cs typeface="+mn-lt"/>
+              </a:rPr>
+              <a:t>. </a:t>
+            </a:r>
+            <a:r>
+              <a:rPr lang="en-US" dirty="0" err="1">
+                <a:ea typeface="+mn-lt"/>
+                <a:cs typeface="+mn-lt"/>
+              </a:rPr>
+              <a:t>Nagła</a:t>
+            </a:r>
+            <a:r>
+              <a:rPr lang="en-US" dirty="0">
+                <a:ea typeface="+mn-lt"/>
+                <a:cs typeface="+mn-lt"/>
+              </a:rPr>
+              <a:t> </a:t>
+            </a:r>
+            <a:r>
+              <a:rPr lang="en-US" dirty="0" err="1">
+                <a:ea typeface="+mn-lt"/>
+                <a:cs typeface="+mn-lt"/>
+              </a:rPr>
+              <a:t>zmiana</a:t>
+            </a:r>
+            <a:r>
+              <a:rPr lang="en-US" dirty="0">
+                <a:ea typeface="+mn-lt"/>
+                <a:cs typeface="+mn-lt"/>
+              </a:rPr>
+              <a:t> </a:t>
+            </a:r>
+            <a:r>
+              <a:rPr lang="en-US" dirty="0" err="1">
+                <a:ea typeface="+mn-lt"/>
+                <a:cs typeface="+mn-lt"/>
+              </a:rPr>
+              <a:t>koniunktury</a:t>
+            </a:r>
+            <a:r>
+              <a:rPr lang="en-US" dirty="0">
+                <a:ea typeface="+mn-lt"/>
+                <a:cs typeface="+mn-lt"/>
+              </a:rPr>
+              <a:t> </a:t>
+            </a:r>
+            <a:r>
+              <a:rPr lang="en-US" dirty="0" err="1">
+                <a:ea typeface="+mn-lt"/>
+                <a:cs typeface="+mn-lt"/>
+              </a:rPr>
+              <a:t>gospodarczej</a:t>
+            </a:r>
+            <a:r>
+              <a:rPr lang="en-US" dirty="0">
+                <a:ea typeface="+mn-lt"/>
+                <a:cs typeface="+mn-lt"/>
+              </a:rPr>
+              <a:t> </a:t>
+            </a:r>
+            <a:r>
+              <a:rPr lang="en-US" dirty="0" err="1">
+                <a:ea typeface="+mn-lt"/>
+                <a:cs typeface="+mn-lt"/>
+              </a:rPr>
+              <a:t>może</a:t>
+            </a:r>
+            <a:r>
+              <a:rPr lang="en-US" dirty="0">
+                <a:ea typeface="+mn-lt"/>
+                <a:cs typeface="+mn-lt"/>
+              </a:rPr>
+              <a:t> </a:t>
+            </a:r>
+            <a:r>
+              <a:rPr lang="en-US" dirty="0" err="1">
+                <a:ea typeface="+mn-lt"/>
+                <a:cs typeface="+mn-lt"/>
+              </a:rPr>
+              <a:t>wymagać</a:t>
+            </a:r>
+            <a:r>
+              <a:rPr lang="en-US" dirty="0">
+                <a:ea typeface="+mn-lt"/>
+                <a:cs typeface="+mn-lt"/>
+              </a:rPr>
+              <a:t> </a:t>
+            </a:r>
+            <a:r>
+              <a:rPr lang="en-US" dirty="0" err="1">
+                <a:ea typeface="+mn-lt"/>
+                <a:cs typeface="+mn-lt"/>
+              </a:rPr>
+              <a:t>rekalibracji</a:t>
+            </a:r>
+            <a:r>
+              <a:rPr lang="en-US" dirty="0">
+                <a:ea typeface="+mn-lt"/>
+                <a:cs typeface="+mn-lt"/>
+              </a:rPr>
+              <a:t> (</a:t>
+            </a:r>
+            <a:r>
+              <a:rPr lang="en-US" dirty="0" err="1">
+                <a:ea typeface="+mn-lt"/>
+                <a:cs typeface="+mn-lt"/>
+              </a:rPr>
+              <a:t>ryzyko</a:t>
+            </a:r>
+            <a:r>
+              <a:rPr lang="en-US" dirty="0">
+                <a:ea typeface="+mn-lt"/>
+                <a:cs typeface="+mn-lt"/>
+              </a:rPr>
+              <a:t> </a:t>
+            </a:r>
+            <a:r>
+              <a:rPr lang="en-US" dirty="0" err="1">
+                <a:ea typeface="+mn-lt"/>
+                <a:cs typeface="+mn-lt"/>
+              </a:rPr>
+              <a:t>niestabilności</a:t>
+            </a:r>
+            <a:r>
+              <a:rPr lang="en-US" dirty="0">
+                <a:ea typeface="+mn-lt"/>
+                <a:cs typeface="+mn-lt"/>
+              </a:rPr>
+              <a:t> </a:t>
+            </a:r>
+            <a:r>
+              <a:rPr lang="en-US" dirty="0" err="1">
+                <a:ea typeface="+mn-lt"/>
+                <a:cs typeface="+mn-lt"/>
+              </a:rPr>
+              <a:t>makroekonomicznej</a:t>
+            </a:r>
+            <a:r>
+              <a:rPr lang="en-US" dirty="0">
+                <a:ea typeface="+mn-lt"/>
+                <a:cs typeface="+mn-lt"/>
+              </a:rPr>
+              <a:t>). </a:t>
+            </a:r>
+            <a:r>
+              <a:rPr lang="en-US" dirty="0" err="1">
+                <a:ea typeface="+mn-lt"/>
+                <a:cs typeface="+mn-lt"/>
+              </a:rPr>
+              <a:t>Należy</a:t>
+            </a:r>
+            <a:r>
+              <a:rPr lang="en-US" dirty="0">
+                <a:ea typeface="+mn-lt"/>
+                <a:cs typeface="+mn-lt"/>
+              </a:rPr>
+              <a:t> </a:t>
+            </a:r>
+            <a:r>
+              <a:rPr lang="en-US" dirty="0" err="1">
+                <a:ea typeface="+mn-lt"/>
+                <a:cs typeface="+mn-lt"/>
+              </a:rPr>
+              <a:t>śledzić</a:t>
+            </a:r>
+            <a:r>
+              <a:rPr lang="en-US" dirty="0">
+                <a:ea typeface="+mn-lt"/>
+                <a:cs typeface="+mn-lt"/>
+              </a:rPr>
+              <a:t> PSI/CSI.</a:t>
+            </a:r>
+          </a:p>
+          <a:p>
+            <a:r>
+              <a:rPr lang="en-US" dirty="0">
+                <a:ea typeface="+mn-lt"/>
+                <a:cs typeface="+mn-lt"/>
+              </a:rPr>
+              <a:t>Black-box: Model Black-Box </a:t>
+            </a:r>
+            <a:r>
+              <a:rPr lang="en-US" dirty="0" err="1">
+                <a:ea typeface="+mn-lt"/>
+                <a:cs typeface="+mn-lt"/>
+              </a:rPr>
+              <a:t>wydaje</a:t>
+            </a:r>
+            <a:r>
+              <a:rPr lang="en-US" dirty="0">
+                <a:ea typeface="+mn-lt"/>
+                <a:cs typeface="+mn-lt"/>
+              </a:rPr>
+              <a:t> </a:t>
+            </a:r>
+            <a:r>
+              <a:rPr lang="en-US" dirty="0" err="1">
+                <a:ea typeface="+mn-lt"/>
+                <a:cs typeface="+mn-lt"/>
+              </a:rPr>
+              <a:t>się</a:t>
+            </a:r>
+            <a:r>
+              <a:rPr lang="en-US" dirty="0">
+                <a:ea typeface="+mn-lt"/>
+                <a:cs typeface="+mn-lt"/>
+              </a:rPr>
+              <a:t> </a:t>
+            </a:r>
+            <a:r>
+              <a:rPr lang="en-US" dirty="0" err="1">
+                <a:ea typeface="+mn-lt"/>
+                <a:cs typeface="+mn-lt"/>
+              </a:rPr>
+              <a:t>nieco</a:t>
+            </a:r>
+            <a:r>
+              <a:rPr lang="en-US" dirty="0">
+                <a:ea typeface="+mn-lt"/>
+                <a:cs typeface="+mn-lt"/>
+              </a:rPr>
+              <a:t> </a:t>
+            </a:r>
+            <a:r>
+              <a:rPr lang="en-US" dirty="0" err="1">
+                <a:ea typeface="+mn-lt"/>
+                <a:cs typeface="+mn-lt"/>
+              </a:rPr>
+              <a:t>przeuczony</a:t>
+            </a:r>
+            <a:r>
+              <a:rPr lang="pl-PL" dirty="0">
+                <a:ea typeface="+mn-lt"/>
+                <a:cs typeface="+mn-lt"/>
+              </a:rPr>
+              <a:t> (po poprawkach zdecydowanie mniej)</a:t>
+            </a:r>
+            <a:r>
+              <a:rPr lang="en-US" dirty="0">
+                <a:ea typeface="+mn-lt"/>
+                <a:cs typeface="+mn-lt"/>
+              </a:rPr>
+              <a:t> </a:t>
+            </a:r>
+            <a:r>
+              <a:rPr lang="en-US" dirty="0" err="1">
+                <a:ea typeface="+mn-lt"/>
+                <a:cs typeface="+mn-lt"/>
+              </a:rPr>
+              <a:t>może</a:t>
+            </a:r>
+            <a:r>
+              <a:rPr lang="en-US" dirty="0">
+                <a:ea typeface="+mn-lt"/>
+                <a:cs typeface="+mn-lt"/>
+              </a:rPr>
+              <a:t> </a:t>
+            </a:r>
+            <a:r>
+              <a:rPr lang="en-US" dirty="0" err="1">
+                <a:ea typeface="+mn-lt"/>
+                <a:cs typeface="+mn-lt"/>
+              </a:rPr>
+              <a:t>mieć</a:t>
+            </a:r>
+            <a:r>
+              <a:rPr lang="en-US" dirty="0">
+                <a:ea typeface="+mn-lt"/>
+                <a:cs typeface="+mn-lt"/>
+              </a:rPr>
+              <a:t> </a:t>
+            </a:r>
+            <a:r>
+              <a:rPr lang="en-US" dirty="0" err="1">
+                <a:ea typeface="+mn-lt"/>
+                <a:cs typeface="+mn-lt"/>
+              </a:rPr>
+              <a:t>momentami</a:t>
+            </a:r>
+            <a:r>
+              <a:rPr lang="en-US" dirty="0">
+                <a:ea typeface="+mn-lt"/>
+                <a:cs typeface="+mn-lt"/>
+              </a:rPr>
+              <a:t> </a:t>
+            </a:r>
+            <a:r>
+              <a:rPr lang="en-US" dirty="0" err="1">
+                <a:ea typeface="+mn-lt"/>
+                <a:cs typeface="+mn-lt"/>
+              </a:rPr>
+              <a:t>problemy</a:t>
+            </a:r>
+            <a:r>
+              <a:rPr lang="en-US" dirty="0">
+                <a:ea typeface="+mn-lt"/>
+                <a:cs typeface="+mn-lt"/>
+              </a:rPr>
+              <a:t> </a:t>
+            </a:r>
+            <a:r>
+              <a:rPr lang="en-US" dirty="0" err="1">
+                <a:ea typeface="+mn-lt"/>
+                <a:cs typeface="+mn-lt"/>
+              </a:rPr>
+              <a:t>dla</a:t>
+            </a:r>
+            <a:r>
+              <a:rPr lang="en-US" dirty="0">
+                <a:ea typeface="+mn-lt"/>
+                <a:cs typeface="+mn-lt"/>
+              </a:rPr>
+              <a:t> </a:t>
+            </a:r>
+            <a:r>
+              <a:rPr lang="en-US" dirty="0" err="1">
+                <a:ea typeface="+mn-lt"/>
+                <a:cs typeface="+mn-lt"/>
+              </a:rPr>
+              <a:t>nowych</a:t>
+            </a:r>
+            <a:r>
+              <a:rPr lang="en-US" dirty="0">
+                <a:ea typeface="+mn-lt"/>
+                <a:cs typeface="+mn-lt"/>
+              </a:rPr>
+              <a:t> </a:t>
+            </a:r>
+            <a:r>
+              <a:rPr lang="en-US" dirty="0" err="1">
+                <a:ea typeface="+mn-lt"/>
+                <a:cs typeface="+mn-lt"/>
+              </a:rPr>
+              <a:t>danych</a:t>
+            </a:r>
+            <a:r>
+              <a:rPr lang="en-US" dirty="0">
+                <a:ea typeface="+mn-lt"/>
+                <a:cs typeface="+mn-lt"/>
+              </a:rPr>
+              <a:t>.</a:t>
+            </a:r>
+          </a:p>
+          <a:p>
+            <a:r>
+              <a:rPr lang="en-US" dirty="0" err="1">
+                <a:ea typeface="+mn-lt"/>
+                <a:cs typeface="+mn-lt"/>
+              </a:rPr>
+              <a:t>Złożone</a:t>
+            </a:r>
+            <a:r>
+              <a:rPr lang="en-US" dirty="0">
+                <a:ea typeface="+mn-lt"/>
+                <a:cs typeface="+mn-lt"/>
+              </a:rPr>
+              <a:t> </a:t>
+            </a:r>
+            <a:r>
+              <a:rPr lang="en-US" dirty="0" err="1">
+                <a:ea typeface="+mn-lt"/>
+                <a:cs typeface="+mn-lt"/>
+              </a:rPr>
+              <a:t>zależności</a:t>
+            </a:r>
+            <a:r>
+              <a:rPr lang="en-US" dirty="0">
+                <a:ea typeface="+mn-lt"/>
+                <a:cs typeface="+mn-lt"/>
+              </a:rPr>
+              <a:t> Na </a:t>
+            </a:r>
+            <a:r>
+              <a:rPr lang="en-US" dirty="0" err="1">
+                <a:ea typeface="+mn-lt"/>
+                <a:cs typeface="+mn-lt"/>
+              </a:rPr>
+              <a:t>regresji</a:t>
+            </a:r>
+            <a:r>
+              <a:rPr lang="en-US" dirty="0">
+                <a:ea typeface="+mn-lt"/>
+                <a:cs typeface="+mn-lt"/>
+              </a:rPr>
+              <a:t> </a:t>
+            </a:r>
+            <a:r>
+              <a:rPr lang="en-US" dirty="0" err="1">
+                <a:ea typeface="+mn-lt"/>
+                <a:cs typeface="+mn-lt"/>
+              </a:rPr>
+              <a:t>logistycznej</a:t>
+            </a:r>
+            <a:r>
+              <a:rPr lang="en-US" dirty="0">
+                <a:ea typeface="+mn-lt"/>
+                <a:cs typeface="+mn-lt"/>
+              </a:rPr>
+              <a:t> </a:t>
+            </a:r>
+            <a:r>
+              <a:rPr lang="en-US" dirty="0" err="1">
+                <a:ea typeface="+mn-lt"/>
+                <a:cs typeface="+mn-lt"/>
+              </a:rPr>
+              <a:t>ryzyko</a:t>
+            </a:r>
+            <a:r>
+              <a:rPr lang="en-US" dirty="0">
+                <a:ea typeface="+mn-lt"/>
+                <a:cs typeface="+mn-lt"/>
+              </a:rPr>
+              <a:t>, </a:t>
+            </a:r>
+            <a:r>
+              <a:rPr lang="en-US" dirty="0" err="1">
+                <a:ea typeface="+mn-lt"/>
+                <a:cs typeface="+mn-lt"/>
+              </a:rPr>
+              <a:t>że</a:t>
+            </a:r>
+            <a:r>
+              <a:rPr lang="en-US" dirty="0">
+                <a:ea typeface="+mn-lt"/>
+                <a:cs typeface="+mn-lt"/>
+              </a:rPr>
+              <a:t> </a:t>
+            </a:r>
+            <a:r>
+              <a:rPr lang="en-US" dirty="0" err="1">
+                <a:ea typeface="+mn-lt"/>
+                <a:cs typeface="+mn-lt"/>
+              </a:rPr>
+              <a:t>koszyki</a:t>
+            </a:r>
+            <a:r>
+              <a:rPr lang="en-US" dirty="0">
+                <a:ea typeface="+mn-lt"/>
+                <a:cs typeface="+mn-lt"/>
+              </a:rPr>
+              <a:t> </a:t>
+            </a:r>
+            <a:r>
+              <a:rPr lang="en-US" dirty="0" err="1">
+                <a:ea typeface="+mn-lt"/>
+                <a:cs typeface="+mn-lt"/>
+              </a:rPr>
+              <a:t>WoE</a:t>
+            </a:r>
+            <a:r>
+              <a:rPr lang="en-US" dirty="0">
+                <a:ea typeface="+mn-lt"/>
+                <a:cs typeface="+mn-lt"/>
+              </a:rPr>
+              <a:t> </a:t>
+            </a:r>
+            <a:r>
+              <a:rPr lang="en-US" dirty="0" err="1">
+                <a:ea typeface="+mn-lt"/>
+                <a:cs typeface="+mn-lt"/>
+              </a:rPr>
+              <a:t>nie</a:t>
+            </a:r>
+            <a:r>
+              <a:rPr lang="en-US" dirty="0">
+                <a:ea typeface="+mn-lt"/>
+                <a:cs typeface="+mn-lt"/>
+              </a:rPr>
+              <a:t> </a:t>
+            </a:r>
+            <a:r>
+              <a:rPr lang="en-US" dirty="0" err="1">
+                <a:ea typeface="+mn-lt"/>
+                <a:cs typeface="+mn-lt"/>
+              </a:rPr>
+              <a:t>odzwierciedlą</a:t>
+            </a:r>
+            <a:r>
+              <a:rPr lang="en-US" dirty="0">
+                <a:ea typeface="+mn-lt"/>
+                <a:cs typeface="+mn-lt"/>
+              </a:rPr>
+              <a:t> </a:t>
+            </a:r>
+            <a:r>
+              <a:rPr lang="en-US" dirty="0" err="1">
+                <a:ea typeface="+mn-lt"/>
+                <a:cs typeface="+mn-lt"/>
+              </a:rPr>
+              <a:t>prawdziwych</a:t>
+            </a:r>
+            <a:r>
+              <a:rPr lang="en-US" dirty="0">
+                <a:ea typeface="+mn-lt"/>
+                <a:cs typeface="+mn-lt"/>
+              </a:rPr>
+              <a:t> </a:t>
+            </a:r>
+            <a:r>
+              <a:rPr lang="en-US" dirty="0" err="1">
+                <a:ea typeface="+mn-lt"/>
+                <a:cs typeface="+mn-lt"/>
+              </a:rPr>
+              <a:t>danych</a:t>
+            </a:r>
+            <a:r>
+              <a:rPr lang="en-US" dirty="0">
+                <a:ea typeface="+mn-lt"/>
+                <a:cs typeface="+mn-lt"/>
+              </a:rPr>
+              <a:t>.</a:t>
             </a:r>
           </a:p>
           <a:p>
             <a:pPr marL="0" indent="0">
               <a:buNone/>
             </a:pPr>
-            <a:endParaRPr lang="en-US">
+            <a:endParaRPr lang="en-US" dirty="0">
               <a:ea typeface="+mn-lt"/>
               <a:cs typeface="+mn-lt"/>
             </a:endParaRPr>
@@ -4519,6 +5092,7 @@
           <a:lstStyle/>
           <a:p>
             <a:fld id="{AD6E1EBF-D5B7-43F2-A5E2-415383AEF6CD}" type="datetime1">
+              <a:rPr/>
               <a:t>02.12.2025</a:t>
             </a:fld>
             <a:endParaRPr lang="en-US" dirty="0"/>
@@ -5302,69 +5876,18 @@
           <a:lstStyle/>
           <a:p>
             <a:r>
-              <a:rPr lang="en-US" dirty="0" err="1">
+              <a:rPr lang="en-US">
                 <a:latin typeface="Calibri"/>
                 <a:ea typeface="Calibri"/>
                 <a:cs typeface="Calibri"/>
               </a:rPr>
-              <a:t>Próg</a:t>
-            </a:r>
-            <a:r>
-              <a:rPr lang="en-US" dirty="0">
-                <a:latin typeface="Calibri"/>
-                <a:ea typeface="Calibri"/>
-                <a:cs typeface="Calibri"/>
-              </a:rPr>
-              <a:t> </a:t>
-            </a:r>
-            <a:r>
-              <a:rPr lang="en-US" dirty="0" err="1">
-                <a:latin typeface="Calibri"/>
-                <a:ea typeface="Calibri"/>
-                <a:cs typeface="Calibri"/>
-              </a:rPr>
-              <a:t>Decyzyjny</a:t>
-            </a:r>
-            <a:r>
-              <a:rPr lang="en-US" dirty="0">
-                <a:latin typeface="Calibri"/>
-                <a:ea typeface="Calibri"/>
-                <a:cs typeface="Calibri"/>
-              </a:rPr>
-              <a:t> I </a:t>
-            </a:r>
-            <a:r>
-              <a:rPr lang="en-US" dirty="0" err="1">
-                <a:latin typeface="Calibri"/>
-                <a:ea typeface="Calibri"/>
-                <a:cs typeface="Calibri"/>
-              </a:rPr>
-              <a:t>wpływ</a:t>
-            </a:r>
-            <a:r>
-              <a:rPr lang="en-US" dirty="0">
-                <a:latin typeface="Calibri"/>
-                <a:ea typeface="Calibri"/>
-                <a:cs typeface="Calibri"/>
-              </a:rPr>
-              <a:t> </a:t>
-            </a:r>
-            <a:r>
-              <a:rPr lang="en-US" dirty="0" err="1">
-                <a:latin typeface="Calibri"/>
-                <a:ea typeface="Calibri"/>
-                <a:cs typeface="Calibri"/>
-              </a:rPr>
-              <a:t>biznesowy</a:t>
-            </a:r>
-            <a:r>
-              <a:rPr lang="en-US" dirty="0">
-                <a:latin typeface="Calibri"/>
-                <a:ea typeface="Calibri"/>
-                <a:cs typeface="Calibri"/>
-              </a:rPr>
-              <a:t> – black box</a:t>
-            </a:r>
+              <a:t>Próg Decyzyjny I wpływ biznesowy – black box</a:t>
+            </a:r>
+            <a:endParaRPr lang="en-US" dirty="0">
+              <a:latin typeface="Calibri"/>
+              <a:ea typeface="Calibri"/>
+              <a:cs typeface="Calibri"/>
+            </a:endParaRPr>
           </a:p>
         </p:txBody>
       </p:sp>
@@ -5390,7 +5913,7 @@
           <a:lstStyle/>
           <a:p>
             <a:fld id="{7EE0C613-8EA2-49AF-AAE4-34430B334CE9}" type="datetime1">
-              <a:rPr lang="pl-PL"/>
+              <a:rPr lang="pl-PL" smtClean="0"/>
               <a:t>02.12.2025</a:t>
             </a:fld>
             <a:endParaRPr lang="en-US"/>
@@ -5448,7 +5971,7 @@
           <a:lstStyle/>
           <a:p>
             <a:fld id="{196A61CA-0502-4EE4-9724-96EA822543E5}" type="slidenum">
-              <a:rPr lang="en-US" dirty="0"/>
+              <a:rPr lang="en-US" smtClean="0"/>
               <a:t>4</a:t>
             </a:fld>
             <a:endParaRPr lang="en-US"/>
@@ -5660,7 +6183,15 @@
             </a:r>
             <a:r>
               <a:rPr lang="en-US" dirty="0"/>
-              <a:t> to: 1244. </a:t>
+              <a:t> to: 1</a:t>
+            </a:r>
+            <a:r>
+              <a:rPr lang="pl-PL" dirty="0"/>
+              <a:t>002</a:t>
+            </a:r>
+            <a:r>
+              <a:rPr lang="en-US" dirty="0"/>
+              <a:t>. </a:t>
             </a:r>
             <a:r>
               <a:rPr lang="en-US" dirty="0" err="1"/>
@@ -5684,7 +6215,11 @@
             </a:r>
             <a:r>
               <a:rPr lang="en-US" dirty="0"/>
-              <a:t> accept rate: 67.56% </a:t>
+              <a:t> accept rate:</a:t>
+            </a:r>
+            <a:r>
+              <a:rPr lang="pl-PL" dirty="0"/>
+              <a:t>73.78% </a:t>
             </a:r>
             <a:r>
               <a:rPr lang="en-US" dirty="0" err="1"/>
@@ -5692,26 +6227,57 @@
             </a:r>
             <a:r>
               <a:rPr lang="en-US" dirty="0"/>
-              <a:t> default rate 4.93%.</a:t>
-            </a:r>
+              <a:t> default rate </a:t>
+            </a:r>
+            <a:r>
+              <a:rPr lang="pl-PL" dirty="0"/>
+              <a:t>6.02%</a:t>
+            </a:r>
+            <a:r>
+              <a:rPr lang="en-US" dirty="0"/>
+              <a:t>.</a:t>
+            </a:r>
+          </a:p>
+        </p:txBody>
+      </p:sp>
+      <p:sp>
+        <p:nvSpPr>
+          <p:cNvPr id="7" name="Symbol zastępczy zawartości 6">
+            <a:extLst>
+              <a:ext uri="{FF2B5EF4-FFF2-40B4-BE49-F238E27FC236}">
+                <a16:creationId xmlns:a16="http://schemas.microsoft.com/office/drawing/2014/main" id="{3FF3220C-7833-B46F-7232-79A70BCFD5A1}"/>
+              </a:ext>
+            </a:extLst>
+          </p:cNvPr>
+          <p:cNvSpPr>
+            <a:spLocks noGrp="1"/>
+          </p:cNvSpPr>
+          <p:nvPr>
+            <p:ph idx="1"/>
+          </p:nvPr>
+        </p:nvSpPr>
+        <p:spPr/>
+        <p:txBody>
+          <a:bodyPr/>
+          <a:lstStyle/>
+          <a:p>
+            <a:endParaRPr lang="pl-PL"/>
           </a:p>
         </p:txBody>
       </p:sp>
       <p:pic>
         <p:nvPicPr>
-          <p:cNvPr id="9" name="Symbol zastępczy zawartości 8" descr="Obraz zawierający tekst, diagram, zrzut ekranu, Wykres&#10;&#10;Zawartość wygenerowana przez AI może być niepoprawna.">
-            <a:extLst>
-              <a:ext uri="{FF2B5EF4-FFF2-40B4-BE49-F238E27FC236}">
-                <a16:creationId xmlns:a16="http://schemas.microsoft.com/office/drawing/2014/main" id="{23983C94-801D-7DA2-D59B-2202692A7447}"/>
+          <p:cNvPr id="11" name="Obraz 10">
+            <a:extLst>
+              <a:ext uri="{FF2B5EF4-FFF2-40B4-BE49-F238E27FC236}">
+                <a16:creationId xmlns:a16="http://schemas.microsoft.com/office/drawing/2014/main" id="{0120C1E0-2501-9ED8-3C10-76EF547510C3}"/>
               </a:ext>
             </a:extLst>
           </p:cNvPr>
           <p:cNvPicPr>
-            <a:picLocks noGrp="1" noChangeAspect="1"/>
+            <a:picLocks noChangeAspect="1"/>
           </p:cNvPicPr>
-          <p:nvPr>
-            <p:ph idx="1"/>
-          </p:nvPr>
+          <p:nvPr/>
         </p:nvPicPr>
         <p:blipFill>
           <a:blip r:embed="rId2"/>
@@ -5721,8 +6287,8 @@
         </p:blipFill>
         <p:spPr>
           <a:xfrm>
-            <a:off x="1429566" y="2088639"/>
-            <a:ext cx="9238434" cy="3543709"/>
+            <a:off x="1338375" y="2181046"/>
+            <a:ext cx="9329625" cy="3587863"/>
           </a:xfrm>
           <a:prstGeom prst="rect">
             <a:avLst/>
@@ -5842,8 +6408,21 @@
                 <a:ea typeface="Calibri"/>
                 <a:cs typeface="Calibri"/>
               </a:rPr>
-              <a:t> – black box</a:t>
-            </a:r>
+              <a:t> – </a:t>
+            </a:r>
+            <a:r>
+              <a:rPr lang="pl-PL" dirty="0">
+                <a:latin typeface="Calibri"/>
+                <a:ea typeface="Calibri"/>
+                <a:cs typeface="Calibri"/>
+              </a:rPr>
+              <a:t>Regresja</a:t>
+            </a:r>
+            <a:endParaRPr lang="en-US" dirty="0">
+              <a:latin typeface="Calibri"/>
+              <a:ea typeface="Calibri"/>
+              <a:cs typeface="Calibri"/>
+            </a:endParaRPr>
           </a:p>
         </p:txBody>
       </p:sp>
@@ -5901,6 +6480,7 @@
           <a:lstStyle/>
           <a:p>
             <a:fld id="{7EE0C613-8EA2-49AF-AAE4-34430B334CE9}" type="datetime1">
+              <a:rPr/>
               <a:t>02.12.2025</a:t>
             </a:fld>
             <a:endParaRPr lang="en-US" dirty="0"/>
@@ -7891,10 +8471,10 @@
       </p:sp>
       <p:pic>
         <p:nvPicPr>
-          <p:cNvPr id="4" name="Symbol zastępczy zawartości 3" descr="Obraz zawierający tekst, zrzut ekranu, numer, Czcionka&#10;&#10;Zawartość wygenerowana przez AI może być niepoprawna.">
-            <a:extLst>
-              <a:ext uri="{FF2B5EF4-FFF2-40B4-BE49-F238E27FC236}">
-                <a16:creationId xmlns:a16="http://schemas.microsoft.com/office/drawing/2014/main" id="{317CA854-244B-82C9-D621-510CC16B6691}"/>
+          <p:cNvPr id="7" name="Symbol zastępczy zawartości 6" descr="Obraz zawierający tekst, numer, zrzut ekranu, Czcionka&#10;&#10;Zawartość wygenerowana przez AI może być niepoprawna.">
+            <a:extLst>
+              <a:ext uri="{FF2B5EF4-FFF2-40B4-BE49-F238E27FC236}">
+                <a16:creationId xmlns:a16="http://schemas.microsoft.com/office/drawing/2014/main" id="{0D77D63E-AB8F-B9E8-4C5E-FEF3BDE166CC}"/>
               </a:ext>
             </a:extLst>
           </p:cNvPr>
@@ -7906,19 +8486,22 @@
           </p:nvPr>
         </p:nvPicPr>
         <p:blipFill>
-          <a:blip r:embed="rId2"/>
+          <a:blip r:embed="rId2" cstate="print">
+            <a:extLst>
+              <a:ext uri="{28A0092B-C50C-407E-A947-70E740481C1C}">
+                <a14:useLocalDpi xmlns:a14="http://schemas.microsoft.com/office/drawing/2010/main" val="0"/>
+              </a:ext>
+            </a:extLst>
+          </a:blip>
           <a:stretch>
             <a:fillRect/>
           </a:stretch>
         </p:blipFill>
         <p:spPr>
           <a:xfrm>
-            <a:off x="428869" y="1902937"/>
-            <a:ext cx="11349998" cy="4603669"/>
+            <a:off x="1430338" y="2329130"/>
+            <a:ext cx="9237662" cy="3723739"/>
           </a:xfrm>
-          <a:prstGeom prst="rect">
-            <a:avLst/>
-          </a:prstGeom>
         </p:spPr>
       </p:pic>
     </p:spTree>
@@ -7987,12 +8570,99 @@
           </a:p>
         </p:txBody>
       </p:sp>
+      <p:sp>
+        <p:nvSpPr>
+          <p:cNvPr id="4" name="Symbol zastępczy daty 3">
+            <a:extLst>
+              <a:ext uri="{FF2B5EF4-FFF2-40B4-BE49-F238E27FC236}">
+                <a16:creationId xmlns:a16="http://schemas.microsoft.com/office/drawing/2014/main" id="{5BB2FD21-CCF8-212E-1D89-88EAA02677B5}"/>
+              </a:ext>
+            </a:extLst>
+          </p:cNvPr>
+          <p:cNvSpPr>
+            <a:spLocks noGrp="1"/>
+          </p:cNvSpPr>
+          <p:nvPr>
+            <p:ph type="dt" sz="half" idx="10"/>
+          </p:nvPr>
+        </p:nvSpPr>
+        <p:spPr/>
+        <p:txBody>
+          <a:bodyPr/>
+          <a:lstStyle/>
+          <a:p>
+            <a:fld id="{5FCAC423-9313-454E-A098-8D3021A3AC0B}" type="datetime1">
+              <a:rPr lang="pl-PL"/>
+              <a:t>02.12.2025</a:t>
+            </a:fld>
+            <a:endParaRPr lang="en-US"/>
+          </a:p>
+        </p:txBody>
+      </p:sp>
+      <p:sp>
+        <p:nvSpPr>
+          <p:cNvPr id="5" name="Symbol zastępczy stopki 4">
+            <a:extLst>
+              <a:ext uri="{FF2B5EF4-FFF2-40B4-BE49-F238E27FC236}">
+                <a16:creationId xmlns:a16="http://schemas.microsoft.com/office/drawing/2014/main" id="{1A7A2711-FF1B-0672-D7C3-268BE0E01941}"/>
+              </a:ext>
+            </a:extLst>
+          </p:cNvPr>
+          <p:cNvSpPr>
+            <a:spLocks noGrp="1"/>
+          </p:cNvSpPr>
+          <p:nvPr>
+            <p:ph type="ftr" sz="quarter" idx="11"/>
+          </p:nvPr>
+        </p:nvSpPr>
+        <p:spPr/>
+        <p:txBody>
+          <a:bodyPr/>
+          <a:lstStyle/>
+          <a:p>
+            <a:r>
+              <a:rPr lang="en-US"/>
+              <a:t>
+              </a:t>
+            </a:r>
+          </a:p>
+        </p:txBody>
+      </p:sp>
+      <p:sp>
+        <p:nvSpPr>
+          <p:cNvPr id="6" name="Symbol zastępczy numeru slajdu 5">
+            <a:extLst>
+              <a:ext uri="{FF2B5EF4-FFF2-40B4-BE49-F238E27FC236}">
+                <a16:creationId xmlns:a16="http://schemas.microsoft.com/office/drawing/2014/main" id="{099F9838-E2BD-C51C-1DFB-C1231E5EB2A7}"/>
+              </a:ext>
+            </a:extLst>
+          </p:cNvPr>
+          <p:cNvSpPr>
+            <a:spLocks noGrp="1"/>
+          </p:cNvSpPr>
+          <p:nvPr>
+            <p:ph type="sldNum" sz="quarter" idx="12"/>
+          </p:nvPr>
+        </p:nvSpPr>
+        <p:spPr/>
+        <p:txBody>
+          <a:bodyPr/>
+          <a:lstStyle/>
+          <a:p>
+            <a:fld id="{196A61CA-0502-4EE4-9724-96EA822543E5}" type="slidenum">
+              <a:rPr lang="en-US" dirty="0"/>
+              <a:t>9</a:t>
+            </a:fld>
+            <a:endParaRPr lang="en-US"/>
+          </a:p>
+        </p:txBody>
+      </p:sp>
       <p:pic>
         <p:nvPicPr>
-          <p:cNvPr id="7" name="Symbol zastępczy zawartości 6" descr="Obraz zawierający tekst, numer, zrzut ekranu, Czcionka&#10;&#10;Zawartość wygenerowana przez AI może być niepoprawna.">
-            <a:extLst>
-              <a:ext uri="{FF2B5EF4-FFF2-40B4-BE49-F238E27FC236}">
-                <a16:creationId xmlns:a16="http://schemas.microsoft.com/office/drawing/2014/main" id="{DC281507-6104-5064-DA61-F87B4A88DD1E}"/>
+          <p:cNvPr id="10" name="Symbol zastępczy zawartości 9" descr="Obraz zawierający tekst, zrzut ekranu, numer, Czcionka&#10;&#10;Zawartość wygenerowana przez AI może być niepoprawna.">
+            <a:extLst>
+              <a:ext uri="{FF2B5EF4-FFF2-40B4-BE49-F238E27FC236}">
+                <a16:creationId xmlns:a16="http://schemas.microsoft.com/office/drawing/2014/main" id="{65D6D30B-CD3B-9AEE-B3AD-E76EDF02B0EF}"/>
               </a:ext>
             </a:extLst>
           </p:cNvPr>
@@ -8004,108 +8674,24 @@
           </p:nvPr>
         </p:nvPicPr>
         <p:blipFill>
-          <a:blip r:embed="rId2"/>
+          <a:blip r:embed="rId2" cstate="print">
+            <a:extLst>
+              <a:ext uri="{28A0092B-C50C-407E-A947-70E740481C1C}">
+                <a14:useLocalDpi xmlns:a14="http://schemas.microsoft.com/office/drawing/2010/main" val="0"/>
+              </a:ext>
+            </a:extLst>
+          </a:blip>
           <a:stretch>
             <a:fillRect/>
           </a:stretch>
         </p:blipFill>
         <p:spPr>
           <a:xfrm>
-            <a:off x="392145" y="1895914"/>
-            <a:ext cx="11414264" cy="4516725"/>
+            <a:off x="1430338" y="2329130"/>
+            <a:ext cx="9237662" cy="3723739"/>
           </a:xfrm>
-          <a:prstGeom prst="rect">
-            <a:avLst/>
-          </a:prstGeom>
         </p:spPr>
       </p:pic>
-      <p:sp>
-        <p:nvSpPr>
-          <p:cNvPr id="4" name="Symbol zastępczy daty 3">
-            <a:extLst>
-              <a:ext uri="{FF2B5EF4-FFF2-40B4-BE49-F238E27FC236}">
-                <a16:creationId xmlns:a16="http://schemas.microsoft.com/office/drawing/2014/main" id="{5BB2FD21-CCF8-212E-1D89-88EAA02677B5}"/>
-              </a:ext>
-            </a:extLst>
-          </p:cNvPr>
-          <p:cNvSpPr>
-            <a:spLocks noGrp="1"/>
-          </p:cNvSpPr>
-          <p:nvPr>
-            <p:ph type="dt" sz="half" idx="10"/>
-          </p:nvPr>
-        </p:nvSpPr>
-        <p:spPr/>
-        <p:txBody>
-          <a:bodyPr/>
-          <a:lstStyle/>
-          <a:p>
-            <a:fld id="{5FCAC423-9313-454E-A098-8D3021A3AC0B}" type="datetime1">
-              <a:rPr lang="pl-PL"/>
-              <a:t>02.12.2025</a:t>
-            </a:fld>
-            <a:endParaRPr lang="en-US"/>
-          </a:p>
-        </p:txBody>
-      </p:sp>
-      <p:sp>
-        <p:nvSpPr>
-          <p:cNvPr id="5" name="Symbol zastępczy stopki 4">
-            <a:extLst>
-              <a:ext uri="{FF2B5EF4-FFF2-40B4-BE49-F238E27FC236}">
-                <a16:creationId xmlns:a16="http://schemas.microsoft.com/office/drawing/2014/main" id="{1A7A2711-FF1B-0672-D7C3-268BE0E01941}"/>
-              </a:ext>
-            </a:extLst>
-          </p:cNvPr>
-          <p:cNvSpPr>
-            <a:spLocks noGrp="1"/>
-          </p:cNvSpPr>
-          <p:nvPr>
-            <p:ph type="ftr" sz="quarter" idx="11"/>
-          </p:nvPr>
-        </p:nvSpPr>
-        <p:spPr/>
-        <p:txBody>
-          <a:bodyPr/>
-          <a:lstStyle/>
-          <a:p>
-            <a:r>
-              <a:rPr lang="en-US"/>
-              <a:t>
-              </a:t>
-            </a:r>
-          </a:p>
-        </p:txBody>
-      </p:sp>
-      <p:sp>
-        <p:nvSpPr>
-          <p:cNvPr id="6" name="Symbol zastępczy numeru slajdu 5">
-            <a:extLst>
-              <a:ext uri="{FF2B5EF4-FFF2-40B4-BE49-F238E27FC236}">
-                <a16:creationId xmlns:a16="http://schemas.microsoft.com/office/drawing/2014/main" id="{099F9838-E2BD-C51C-1DFB-C1231E5EB2A7}"/>
-              </a:ext>
-            </a:extLst>
-          </p:cNvPr>
-          <p:cNvSpPr>
-            <a:spLocks noGrp="1"/>
-          </p:cNvSpPr>
-          <p:nvPr>
-            <p:ph type="sldNum" sz="quarter" idx="12"/>
-          </p:nvPr>
-        </p:nvSpPr>
-        <p:spPr/>
-        <p:txBody>
-          <a:bodyPr/>
-          <a:lstStyle/>
-          <a:p>
-            <a:fld id="{196A61CA-0502-4EE4-9724-96EA822543E5}" type="slidenum">
-              <a:rPr lang="en-US" dirty="0"/>
-              <a:t>9</a:t>
-            </a:fld>
-            <a:endParaRPr lang="en-US"/>
-          </a:p>
-        </p:txBody>
-      </p:sp>
     </p:spTree>
     <p:extLst>
       <p:ext uri="{BB962C8B-B14F-4D97-AF65-F5344CB8AC3E}">
